--- a/companies/calderwood-partners/Engagements/Scott, Smith and Edwards/2011.03.11 - Briefing Deck - Scott, Smith and Edwards.pptx
+++ b/companies/calderwood-partners/Engagements/Scott, Smith and Edwards/2011.03.11 - Briefing Deck - Scott, Smith and Edwards.pptx
@@ -10,6 +10,7 @@
     <p:sldId id="258" r:id="rId9"/>
     <p:sldId id="259" r:id="rId10"/>
     <p:sldId id="260" r:id="rId11"/>
+    <p:sldId id="261" r:id="rId12"/>
   </p:sldIdLst>
   <p:sldSz cx="9144000" cy="6858000" type="screen4x3"/>
   <p:notesSz cx="6858000" cy="9144000"/>
@@ -3113,7 +3114,7 @@
                   <a:srgbClr val="4A2E2A"/>
                 </a:solidFill>
               </a:rPr>
-              <a:t>Digital Operating Model — Scott, Smith and Edwards</a:t>
+              <a:t>Digital Operating Model for Scott, Smith and Edwards</a:t>
             </a:r>
           </a:p>
         </p:txBody>
@@ -3138,27 +3139,9 @@
             </a:r>
           </a:p>
           <a:p>
-            <a:pPr lvl="1"/>
-            <a:r>
-              <a:t>A working briefing for Melissa Johnson, General Manager</a:t>
-            </a:r>
-          </a:p>
-          <a:p>
-            <a:pPr lvl="1"/>
-            <a:r>
-              <a:t>Engagement began February 16, 2011</a:t>
-            </a:r>
-          </a:p>
-          <a:p>
-            <a:pPr lvl="1"/>
-            <a:r>
-              <a:t>Prepared by Deborah Allen, with Jason Torres, Principal</a:t>
-            </a:r>
-          </a:p>
-          <a:p>
-            <a:pPr lvl="1"/>
-            <a:r>
-              <a:t>Early-phase read: how we are set up and what we see so far, not recommendations</a:t>
+            <a:pPr/>
+            <a:r>
+              <a:t>An interim briefing for the leadership team on the operating-model engagement. This is a read of where the work stands and what we are examining, not a set of conclusions; those come later, and only once the numbers behind them are settled with your people.</a:t>
             </a:r>
           </a:p>
         </p:txBody>
@@ -3202,7 +3185,7 @@
                   <a:srgbClr val="4A2E2A"/>
                 </a:solidFill>
               </a:rPr>
-              <a:t>What you asked us to answer</a:t>
+              <a:t>Where the Work Stands</a:t>
             </a:r>
           </a:p>
         </p:txBody>
@@ -3224,25 +3207,25 @@
           <a:p>
             <a:pPr lvl="1"/>
             <a:r>
-              <a:t>Match the organization behind the web channel to the volume it now carries</a:t>
+              <a:t>The engagement opened on February 16, 2011 and is in its early weeks.</a:t>
             </a:r>
           </a:p>
           <a:p>
             <a:pPr lvl="1"/>
             <a:r>
-              <a:t>Fix who owns the online channel end to end, and who decides what along it</a:t>
+              <a:t>We are building the present-state read: how the business runs today across its main lines.</a:t>
             </a:r>
           </a:p>
           <a:p>
             <a:pPr lvl="1"/>
             <a:r>
-              <a:t>Show what the channel costs to run today, in numbers your own finance team recognizes</a:t>
+              <a:t>Nothing here is a recommendation. The design work comes after the present-state picture is settled.</a:t>
             </a:r>
           </a:p>
           <a:p>
             <a:pPr lvl="1"/>
             <a:r>
-              <a:t>Lay out a practical path from where you are to where the channel needs to be</a:t>
+              <a:t>Today is about sharing what we are examining and agreeing the questions worth pursuing next.</a:t>
             </a:r>
           </a:p>
         </p:txBody>
@@ -3286,7 +3269,7 @@
                   <a:srgbClr val="4A2E2A"/>
                 </a:solidFill>
               </a:rPr>
-              <a:t>How we are working</a:t>
+              <a:t>Your Team</a:t>
             </a:r>
           </a:p>
         </p:txBody>
@@ -3308,25 +3291,19 @@
           <a:p>
             <a:pPr lvl="1"/>
             <a:r>
-              <a:t>We trace a real order from the web page to the shipping dock and mark every hand-off along the way</a:t>
+              <a:t>Jason Torres, Principal, leads the engagement and is your point of contact.</a:t>
             </a:r>
           </a:p>
           <a:p>
             <a:pPr lvl="1"/>
             <a:r>
-              <a:t>We start from your charts, your systems, and your own figures, not from a template</a:t>
+              <a:t>Deborah Allen, Consultant, carries the analysis and builds the exhibits behind it.</a:t>
             </a:r>
           </a:p>
           <a:p>
             <a:pPr lvl="1"/>
             <a:r>
-              <a:t>Deborah Allen builds the current-state map and the cost picture</a:t>
-            </a:r>
-          </a:p>
-          <a:p>
-            <a:pPr lvl="1"/>
-            <a:r>
-              <a:t>Jason Torres owns the design and is your day-to-day contact</a:t>
+              <a:t>Sponsored on your side by Melissa Johnson, General Manager, who owns the data requests.</a:t>
             </a:r>
           </a:p>
         </p:txBody>
@@ -3370,7 +3347,7 @@
                   <a:srgbClr val="4A2E2A"/>
                 </a:solidFill>
               </a:rPr>
-              <a:t>What we have set up so far</a:t>
+              <a:t>How We Work</a:t>
             </a:r>
           </a:p>
         </p:txBody>
@@ -3392,25 +3369,19 @@
           <a:p>
             <a:pPr lvl="1"/>
             <a:r>
-              <a:t>The data request is out, and the first order and cost figures are in and reconciling</a:t>
+              <a:t>We start by listening, then set down the few judgments the operating model turns on.</a:t>
             </a:r>
           </a:p>
           <a:p>
             <a:pPr lvl="1"/>
             <a:r>
-              <a:t>Interviews with the channel managers are scheduled through the coming weeks</a:t>
+              <a:t>Every recommendation will trace back to the evidence behind it, figure by figure.</a:t>
             </a:r>
           </a:p>
           <a:p>
             <a:pPr lvl="1"/>
             <a:r>
-              <a:t>A first draft of the order path exists and is being checked against how the work is really done</a:t>
-            </a:r>
-          </a:p>
-          <a:p>
-            <a:pPr lvl="1"/>
-            <a:r>
-              <a:t>No target structure is on the table yet, and none should be read into this briefing</a:t>
+              <a:t>Where the evidence supports only a range, we will say so instead of rounding it off to look finished.</a:t>
             </a:r>
           </a:p>
         </p:txBody>
@@ -3454,7 +3425,7 @@
                   <a:srgbClr val="4A2E2A"/>
                 </a:solidFill>
               </a:rPr>
-              <a:t>What comes next</a:t>
+              <a:t>What We Are Examining</a:t>
             </a:r>
           </a:p>
         </p:txBody>
@@ -3476,25 +3447,109 @@
           <a:p>
             <a:pPr lvl="1"/>
             <a:r>
-              <a:t>Finish the interviews and close the current-state map</a:t>
+              <a:t>The operating model as it runs today: the roles, the hand-offs, and the processes between them.</a:t>
             </a:r>
           </a:p>
           <a:p>
             <a:pPr lvl="1"/>
             <a:r>
-              <a:t>Turn the cost picture into a view by function, so spend can be read against who owns it</a:t>
+              <a:t>Where the online channels change what the work requires, and where they only add a step.</a:t>
             </a:r>
           </a:p>
           <a:p>
             <a:pPr lvl="1"/>
             <a:r>
-              <a:t>Bring the first findings to the next working session for discussion</a:t>
+              <a:t>The cost-to-serve for each main line, so we can see what the present model actually costs.</a:t>
             </a:r>
           </a:p>
           <a:p>
             <a:pPr lvl="1"/>
             <a:r>
-              <a:t>Questions on the design to Jason Torres; anything on the data or systems to Deborah Allen</a:t>
+              <a:t>Where the logic is consistent across lines, and where the same task is handled several ways.</a:t>
+            </a:r>
+          </a:p>
+        </p:txBody>
+      </p:sp>
+    </p:spTree>
+  </p:cSld>
+  <p:clrMapOvr>
+    <a:masterClrMapping/>
+  </p:clrMapOvr>
+</p:sld>
+</file>
+
+<file path=ppt/slides/slide6.xml><?xml version="1.0" encoding="utf-8"?>
+<p:sld xmlns:a="http://schemas.openxmlformats.org/drawingml/2006/main" xmlns:p="http://schemas.openxmlformats.org/presentationml/2006/main" xmlns:r="http://schemas.openxmlformats.org/officeDocument/2006/relationships">
+  <p:cSld>
+    <p:spTree>
+      <p:nvGrpSpPr>
+        <p:cNvPr id="1" name=""/>
+        <p:cNvGrpSpPr/>
+        <p:nvPr/>
+      </p:nvGrpSpPr>
+      <p:grpSpPr/>
+      <p:sp>
+        <p:nvSpPr>
+          <p:cNvPr id="2" name="Title 1"/>
+          <p:cNvSpPr>
+            <a:spLocks noGrp="1"/>
+          </p:cNvSpPr>
+          <p:nvPr>
+            <p:ph type="title"/>
+          </p:nvPr>
+        </p:nvSpPr>
+        <p:spPr/>
+        <p:txBody>
+          <a:bodyPr/>
+          <a:lstStyle/>
+          <a:p>
+            <a:r>
+              <a:rPr>
+                <a:solidFill>
+                  <a:srgbClr val="4A2E2A"/>
+                </a:solidFill>
+              </a:rPr>
+              <a:t>Next Steps</a:t>
+            </a:r>
+          </a:p>
+        </p:txBody>
+      </p:sp>
+      <p:sp>
+        <p:nvSpPr>
+          <p:cNvPr id="3" name="Content Placeholder 2"/>
+          <p:cNvSpPr>
+            <a:spLocks noGrp="1"/>
+          </p:cNvSpPr>
+          <p:nvPr>
+            <p:ph idx="1"/>
+          </p:nvPr>
+        </p:nvSpPr>
+        <p:spPr/>
+        <p:txBody>
+          <a:bodyPr/>
+          <a:lstStyle/>
+          <a:p>
+            <a:pPr lvl="1"/>
+            <a:r>
+              <a:t>Finish the present-state read across the remaining lines.</a:t>
+            </a:r>
+          </a:p>
+          <a:p>
+            <a:pPr lvl="1"/>
+            <a:r>
+              <a:t>Pull the cost-to-serve for each line and reconcile it with your figures.</a:t>
+            </a:r>
+          </a:p>
+          <a:p>
+            <a:pPr lvl="1"/>
+            <a:r>
+              <a:t>Keep data requests flowing through Melissa Johnson as a single consolidated list.</a:t>
+            </a:r>
+          </a:p>
+          <a:p>
+            <a:pPr lvl="1"/>
+            <a:r>
+              <a:t>Agree the two or three questions the design should turn on.</a:t>
             </a:r>
           </a:p>
         </p:txBody>
